--- a/Tactical_Workflow_OnePager.pptx
+++ b/Tactical_Workflow_OnePager.pptx
@@ -3134,7 +3134,7 @@
                 </a:solidFill>
                 <a:latin typeface="Calibri"/>
               </a:rPr>
-              <a:t>MERIDIAN FAMILY OFFICE COPILOT · v6</a:t>
+              <a:t>MERIDIAN FAMILY OFFICE COPILOT · v7</a:t>
             </a:r>
           </a:p>
         </p:txBody>
@@ -3630,7 +3630,7 @@
         <p:spPr>
           <a:xfrm>
             <a:off x="6492240" y="1828800"/>
-            <a:ext cx="4965192" cy="1481328"/>
+            <a:ext cx="4965192" cy="932688"/>
           </a:xfrm>
           <a:prstGeom prst="roundRect">
             <a:avLst>
@@ -3677,7 +3677,7 @@
               </a:spcAft>
             </a:pPr>
             <a:r>
-              <a:rPr sz="1400" b="1" i="0">
+              <a:rPr sz="1300" b="1" i="0">
                 <a:solidFill>
                   <a:srgbClr val="16203C"/>
                 </a:solidFill>
@@ -3689,17 +3689,17 @@
           <a:p>
             <a:pPr algn="l">
               <a:lnSpc>
-                <a:spcPct val="110000"/>
+                <a:spcPct val="104000"/>
               </a:lnSpc>
               <a:spcBef>
-                <a:spcPts val="500"/>
+                <a:spcPts val="300"/>
               </a:spcBef>
               <a:spcAft>
                 <a:spcPts val="0"/>
               </a:spcAft>
             </a:pPr>
             <a:r>
-              <a:rPr sz="1150" b="0" i="0">
+              <a:rPr sz="1050" b="0" i="0">
                 <a:solidFill>
                   <a:srgbClr val="47517A"/>
                 </a:solidFill>
@@ -3711,11 +3711,11 @@
           <a:p>
             <a:pPr>
               <a:spcBef>
-                <a:spcPts val="600"/>
+                <a:spcPts val="400"/>
               </a:spcBef>
             </a:pPr>
             <a:r>
-              <a:rPr sz="1100" b="1">
+              <a:rPr sz="1050" b="1">
                 <a:solidFill>
                   <a:srgbClr val="16203C"/>
                 </a:solidFill>
@@ -3724,7 +3724,7 @@
               <a:t>S&amp;P 500 · </a:t>
             </a:r>
             <a:r>
-              <a:rPr sz="1100" b="1">
+              <a:rPr sz="1050" b="1">
                 <a:solidFill>
                   <a:srgbClr val="9C7422"/>
                 </a:solidFill>
@@ -3733,7 +3733,7 @@
               <a:t>−15/−20%</a:t>
             </a:r>
             <a:r>
-              <a:rPr sz="1100" b="1">
+              <a:rPr sz="1050" b="1">
                 <a:solidFill>
                   <a:srgbClr val="16203C"/>
                 </a:solidFill>
@@ -3742,7 +3742,7 @@
               <a:t>     Gold · </a:t>
             </a:r>
             <a:r>
-              <a:rPr sz="1100" b="1">
+              <a:rPr sz="1050" b="1">
                 <a:solidFill>
                   <a:srgbClr val="9C7422"/>
                 </a:solidFill>
@@ -3761,8 +3761,8 @@
         </p:nvSpPr>
         <p:spPr>
           <a:xfrm>
-            <a:off x="9171432" y="1938528"/>
-            <a:ext cx="2148840" cy="292608"/>
+            <a:off x="9262872" y="1920240"/>
+            <a:ext cx="2084831" cy="274320"/>
           </a:xfrm>
           <a:prstGeom prst="rect">
             <a:avLst/>
@@ -3785,7 +3785,7 @@
               </a:spcAft>
             </a:pPr>
             <a:r>
-              <a:rPr sz="950" b="1" i="0" spc="60">
+              <a:rPr sz="900" b="1" i="0" spc="50">
                 <a:solidFill>
                   <a:srgbClr val="9C7422"/>
                 </a:solidFill>
@@ -3804,8 +3804,8 @@
         </p:nvSpPr>
         <p:spPr>
           <a:xfrm>
-            <a:off x="6492240" y="3547872"/>
-            <a:ext cx="4965192" cy="1481328"/>
+            <a:off x="6492240" y="2962656"/>
+            <a:ext cx="4965192" cy="932688"/>
           </a:xfrm>
           <a:prstGeom prst="roundRect">
             <a:avLst>
@@ -3852,7 +3852,7 @@
               </a:spcAft>
             </a:pPr>
             <a:r>
-              <a:rPr sz="1400" b="1" i="0">
+              <a:rPr sz="1300" b="1" i="0">
                 <a:solidFill>
                   <a:srgbClr val="16203C"/>
                 </a:solidFill>
@@ -3864,17 +3864,17 @@
           <a:p>
             <a:pPr algn="l">
               <a:lnSpc>
-                <a:spcPct val="110000"/>
+                <a:spcPct val="104000"/>
               </a:lnSpc>
               <a:spcBef>
-                <a:spcPts val="500"/>
+                <a:spcPts val="300"/>
               </a:spcBef>
               <a:spcAft>
                 <a:spcPts val="0"/>
               </a:spcAft>
             </a:pPr>
             <a:r>
-              <a:rPr sz="1150" b="0" i="0">
+              <a:rPr sz="1050" b="0" i="0">
                 <a:solidFill>
                   <a:srgbClr val="47517A"/>
                 </a:solidFill>
@@ -3889,14 +3889,14 @@
                 <a:spcPct val="100000"/>
               </a:lnSpc>
               <a:spcBef>
-                <a:spcPts val="600"/>
+                <a:spcPts val="400"/>
               </a:spcBef>
               <a:spcAft>
                 <a:spcPts val="0"/>
               </a:spcAft>
             </a:pPr>
             <a:r>
-              <a:rPr sz="1100" b="0" i="0">
+              <a:rPr sz="1050" b="0" i="0">
                 <a:solidFill>
                   <a:srgbClr val="47517A"/>
                 </a:solidFill>
@@ -3915,8 +3915,8 @@
         </p:nvSpPr>
         <p:spPr>
           <a:xfrm>
-            <a:off x="8439912" y="3657600"/>
-            <a:ext cx="2880360" cy="292608"/>
+            <a:off x="8531351" y="3054096"/>
+            <a:ext cx="2788920" cy="274320"/>
           </a:xfrm>
           <a:prstGeom prst="rect">
             <a:avLst/>
@@ -3939,7 +3939,7 @@
               </a:spcAft>
             </a:pPr>
             <a:r>
-              <a:rPr sz="950" b="1" i="0" spc="50">
+              <a:rPr sz="900" b="1" i="0" spc="40">
                 <a:solidFill>
                   <a:srgbClr val="838CAD"/>
                 </a:solidFill>
@@ -3952,7 +3952,161 @@
       </p:sp>
       <p:sp>
         <p:nvSpPr>
-          <p:cNvPr id="13" name="TextBox 12"/>
+          <p:cNvPr id="13" name="Rounded Rectangle 12"/>
+          <p:cNvSpPr/>
+          <p:nvPr/>
+        </p:nvSpPr>
+        <p:spPr>
+          <a:xfrm>
+            <a:off x="6492240" y="4096511"/>
+            <a:ext cx="4965192" cy="932688"/>
+          </a:xfrm>
+          <a:prstGeom prst="roundRect">
+            <a:avLst>
+              <a:gd name="adj" fmla="val 8000"/>
+            </a:avLst>
+          </a:prstGeom>
+          <a:solidFill>
+            <a:srgbClr val="E6F1EB"/>
+          </a:solidFill>
+          <a:ln w="15875">
+            <a:solidFill>
+              <a:srgbClr val="2F6F57"/>
+            </a:solidFill>
+          </a:ln>
+          <a:effectLst/>
+        </p:spPr>
+        <p:style>
+          <a:lnRef idx="1">
+            <a:schemeClr val="accent1"/>
+          </a:lnRef>
+          <a:fillRef idx="3">
+            <a:schemeClr val="accent1"/>
+          </a:fillRef>
+          <a:effectRef idx="2">
+            <a:schemeClr val="accent1"/>
+          </a:effectRef>
+          <a:fontRef idx="minor">
+            <a:schemeClr val="lt1"/>
+          </a:fontRef>
+        </p:style>
+        <p:txBody>
+          <a:bodyPr rtlCol="0" anchor="t" wrap="square" lIns="137160" rIns="137160" tIns="100584" bIns="100584"/>
+          <a:lstStyle/>
+          <a:p>
+            <a:pPr algn="l">
+              <a:lnSpc>
+                <a:spcPct val="100000"/>
+              </a:lnSpc>
+              <a:spcBef>
+                <a:spcPts val="0"/>
+              </a:spcBef>
+              <a:spcAft>
+                <a:spcPts val="0"/>
+              </a:spcAft>
+            </a:pPr>
+            <a:r>
+              <a:rPr sz="1300" b="1" i="0">
+                <a:solidFill>
+                  <a:srgbClr val="16203C"/>
+                </a:solidFill>
+                <a:latin typeface="Calibri"/>
+              </a:rPr>
+              <a:t>📥  Proposed allocation</a:t>
+            </a:r>
+          </a:p>
+          <a:p>
+            <a:pPr algn="l">
+              <a:lnSpc>
+                <a:spcPct val="104000"/>
+              </a:lnSpc>
+              <a:spcBef>
+                <a:spcPts val="300"/>
+              </a:spcBef>
+              <a:spcAft>
+                <a:spcPts val="0"/>
+              </a:spcAft>
+            </a:pPr>
+            <a:r>
+              <a:rPr sz="1050" b="0" i="0">
+                <a:solidFill>
+                  <a:srgbClr val="47517A"/>
+                </a:solidFill>
+                <a:latin typeface="Calibri"/>
+              </a:rPr>
+              <a:t>If the client stated weights → offered to fill the sleeves.</a:t>
+            </a:r>
+          </a:p>
+          <a:p>
+            <a:pPr algn="l">
+              <a:lnSpc>
+                <a:spcPct val="100000"/>
+              </a:lnSpc>
+              <a:spcBef>
+                <a:spcPts val="400"/>
+              </a:spcBef>
+              <a:spcAft>
+                <a:spcPts val="0"/>
+              </a:spcAft>
+            </a:pPr>
+            <a:r>
+              <a:rPr sz="1050" b="0" i="0">
+                <a:solidFill>
+                  <a:srgbClr val="47517A"/>
+                </a:solidFill>
+                <a:latin typeface="Consolas"/>
+              </a:rPr>
+              <a:t>Nasdaq 20% + S&amp;P 30% → equity 50%</a:t>
+            </a:r>
+          </a:p>
+        </p:txBody>
+      </p:sp>
+      <p:sp>
+        <p:nvSpPr>
+          <p:cNvPr id="14" name="TextBox 13"/>
+          <p:cNvSpPr txBox="1"/>
+          <p:nvPr/>
+        </p:nvSpPr>
+        <p:spPr>
+          <a:xfrm>
+            <a:off x="9262872" y="4187951"/>
+            <a:ext cx="2084831" cy="274320"/>
+          </a:xfrm>
+          <a:prstGeom prst="rect">
+            <a:avLst/>
+          </a:prstGeom>
+          <a:noFill/>
+        </p:spPr>
+        <p:txBody>
+          <a:bodyPr wrap="square" anchor="t"/>
+          <a:lstStyle/>
+          <a:p>
+            <a:pPr algn="r">
+              <a:lnSpc>
+                <a:spcPct val="100000"/>
+              </a:lnSpc>
+              <a:spcBef>
+                <a:spcPts val="0"/>
+              </a:spcBef>
+              <a:spcAft>
+                <a:spcPts val="0"/>
+              </a:spcAft>
+            </a:pPr>
+            <a:r>
+              <a:rPr sz="900" b="1" i="0" spc="50">
+                <a:solidFill>
+                  <a:srgbClr val="2F6F57"/>
+                </a:solidFill>
+                <a:latin typeface="Calibri"/>
+              </a:rPr>
+              <a:t>YOU APPLY / IGNORE</a:t>
+            </a:r>
+          </a:p>
+        </p:txBody>
+      </p:sp>
+      <p:sp>
+        <p:nvSpPr>
+          <p:cNvPr id="15" name="TextBox 14"/>
           <p:cNvSpPr txBox="1"/>
           <p:nvPr/>
         </p:nvSpPr>
@@ -3995,7 +4149,7 @@
       </p:sp>
       <p:sp>
         <p:nvSpPr>
-          <p:cNvPr id="14" name="Rounded Rectangle 13"/>
+          <p:cNvPr id="16" name="Rounded Rectangle 15"/>
           <p:cNvSpPr/>
           <p:nvPr/>
         </p:nvSpPr>

--- a/Tactical_Workflow_OnePager.pptx
+++ b/Tactical_Workflow_OnePager.pptx
@@ -3134,7 +3134,7 @@
                 </a:solidFill>
                 <a:latin typeface="Calibri"/>
               </a:rPr>
-              <a:t>MERIDIAN FAMILY OFFICE COPILOT · v7</a:t>
+              <a:t>MERIDIAN FAMILY OFFICE COPILOT · v8</a:t>
             </a:r>
           </a:p>
         </p:txBody>
@@ -4207,13 +4207,13 @@
                 </a:solidFill>
                 <a:latin typeface="Calibri"/>
               </a:rPr>
-              <a:t>THE GUARDRAIL</a:t>
+              <a:t>THE GUARDRAIL · v8 TIERED</a:t>
             </a:r>
           </a:p>
           <a:p>
             <a:pPr algn="l">
               <a:lnSpc>
-                <a:spcPct val="110000"/>
+                <a:spcPct val="108000"/>
               </a:lnSpc>
               <a:spcBef>
                 <a:spcPts val="400"/>
@@ -4223,13 +4223,13 @@
               </a:spcAft>
             </a:pPr>
             <a:r>
-              <a:rPr sz="1450" b="0" i="1">
+              <a:rPr sz="1300" b="0" i="1">
                 <a:solidFill>
                   <a:srgbClr val="FFFFFF"/>
                 </a:solidFill>
                 <a:latin typeface="Georgia"/>
               </a:rPr>
-              <a:t>Guidance shapes the narrative and the watchlist — never a computed number. Every figure stays derived from the client's real holdings.</a:t>
+              <a:t>Each item is tiered 🔒 enforced / 📡 monitored / 📝 advisory. An enforced price trigger can gate a rebalance buy (→ hold) against a sourced live price; everything else shapes the narrative &amp; watchlist. A client's condition can gate or flag a trade — never invent one.</a:t>
             </a:r>
           </a:p>
         </p:txBody>

--- a/Tactical_Workflow_OnePager.pptx
+++ b/Tactical_Workflow_OnePager.pptx
@@ -3134,7 +3134,7 @@
                 </a:solidFill>
                 <a:latin typeface="Calibri"/>
               </a:rPr>
-              <a:t>MERIDIAN FAMILY OFFICE COPILOT · v8</a:t>
+              <a:t>MERIDIAN FAMILY OFFICE COPILOT · v10</a:t>
             </a:r>
           </a:p>
         </p:txBody>
@@ -3220,7 +3220,7 @@
                 </a:solidFill>
                 <a:latin typeface="Calibri"/>
               </a:rPr>
-              <a:t>What the copilot does the moment you confirm the sorted items — read left to right.</a:t>
+              <a:t>How the copilot turns the client's instructions and documents into a proposal — read left to right.</a:t>
             </a:r>
           </a:p>
         </p:txBody>
@@ -3287,13 +3287,13 @@
                 </a:solidFill>
                 <a:latin typeface="Calibri"/>
               </a:rPr>
-              <a:t>1 · CLIENT'S WORDS</a:t>
+              <a:t>1 · CLIENT'S WORDS + DOCS</a:t>
             </a:r>
           </a:p>
           <a:p>
             <a:pPr algn="l">
               <a:lnSpc>
-                <a:spcPct val="100000"/>
+                <a:spcPct val="105000"/>
               </a:lnSpc>
               <a:spcBef>
                 <a:spcPts val="300"/>
@@ -3303,22 +3303,22 @@
               </a:spcAft>
             </a:pPr>
             <a:r>
-              <a:rPr sz="1150" b="0" i="0">
+              <a:rPr sz="1100" b="0" i="0">
                 <a:solidFill>
                   <a:srgbClr val="47517A"/>
                 </a:solidFill>
                 <a:latin typeface="Calibri"/>
               </a:rPr>
-              <a:t>In plain language</a:t>
+              <a:t>In plain language, plus statements &amp; research</a:t>
             </a:r>
           </a:p>
           <a:p>
             <a:pPr algn="l">
               <a:lnSpc>
-                <a:spcPct val="105000"/>
+                <a:spcPct val="103000"/>
               </a:lnSpc>
               <a:spcBef>
-                <a:spcPts val="1100"/>
+                <a:spcPts val="1000"/>
               </a:spcBef>
               <a:spcAft>
                 <a:spcPts val="0"/>
@@ -3337,7 +3337,7 @@
           <a:p>
             <a:pPr algn="l">
               <a:lnSpc>
-                <a:spcPct val="105000"/>
+                <a:spcPct val="103000"/>
               </a:lnSpc>
               <a:spcBef>
                 <a:spcPts val="500"/>
@@ -3359,7 +3359,7 @@
           <a:p>
             <a:pPr algn="l">
               <a:lnSpc>
-                <a:spcPct val="105000"/>
+                <a:spcPct val="103000"/>
               </a:lnSpc>
               <a:spcBef>
                 <a:spcPts val="500"/>
@@ -3381,7 +3381,7 @@
           <a:p>
             <a:pPr algn="l">
               <a:lnSpc>
-                <a:spcPct val="105000"/>
+                <a:spcPct val="103000"/>
               </a:lnSpc>
               <a:spcBef>
                 <a:spcPts val="500"/>
@@ -3403,7 +3403,7 @@
           <a:p>
             <a:pPr algn="l">
               <a:lnSpc>
-                <a:spcPct val="105000"/>
+                <a:spcPct val="103000"/>
               </a:lnSpc>
               <a:spcBef>
                 <a:spcPts val="500"/>
@@ -3419,7 +3419,7 @@
                 </a:solidFill>
                 <a:latin typeface="Consolas"/>
               </a:rPr>
-              <a:t>"impact of rate hikes?"</a:t>
+              <a:t>+ statements · research · notes</a:t>
             </a:r>
           </a:p>
         </p:txBody>
@@ -3432,20 +3432,20 @@
         </p:nvSpPr>
         <p:spPr>
           <a:xfrm>
-            <a:off x="3977639" y="2514600"/>
-            <a:ext cx="2057400" cy="1828800"/>
+            <a:off x="3977639" y="2231136"/>
+            <a:ext cx="2468880" cy="2395728"/>
           </a:xfrm>
           <a:prstGeom prst="roundRect">
             <a:avLst>
-              <a:gd name="adj" fmla="val 7000"/>
+              <a:gd name="adj" fmla="val 6000"/>
             </a:avLst>
           </a:prstGeom>
           <a:solidFill>
-            <a:srgbClr val="E6F1EB"/>
+            <a:srgbClr val="F7EFDC"/>
           </a:solidFill>
           <a:ln w="19050">
             <a:solidFill>
-              <a:srgbClr val="2F6F57"/>
+              <a:srgbClr val="B0872A"/>
             </a:solidFill>
           </a:ln>
           <a:effectLst/>
@@ -3482,33 +3482,143 @@
             <a:r>
               <a:rPr sz="1100" b="1" i="0" spc="80">
                 <a:solidFill>
-                  <a:srgbClr val="2F6F57"/>
+                  <a:srgbClr val="9C7422"/>
                 </a:solidFill>
                 <a:latin typeface="Calibri"/>
               </a:rPr>
-              <a:t>2 · SORT + CONFIRM</a:t>
+              <a:t>2 · ONE PROMPT</a:t>
             </a:r>
           </a:p>
           <a:p>
             <a:pPr algn="l">
               <a:lnSpc>
-                <a:spcPct val="115000"/>
+                <a:spcPct val="100000"/>
               </a:lnSpc>
               <a:spcBef>
-                <a:spcPts val="900"/>
+                <a:spcPts val="600"/>
               </a:spcBef>
               <a:spcAft>
                 <a:spcPts val="0"/>
               </a:spcAft>
             </a:pPr>
             <a:r>
-              <a:rPr sz="1200" b="0" i="0">
+              <a:rPr sz="1100" b="0" i="0">
                 <a:solidFill>
                   <a:srgbClr val="47517A"/>
                 </a:solidFill>
                 <a:latin typeface="Calibri"/>
               </a:rPr>
-              <a:t>The copilot types each ask; the analyst reviews and confirms in a table.</a:t>
+              <a:t>Assembled by the copilot:</a:t>
+            </a:r>
+          </a:p>
+          <a:p>
+            <a:pPr algn="l">
+              <a:lnSpc>
+                <a:spcPct val="102000"/>
+              </a:lnSpc>
+              <a:spcBef>
+                <a:spcPts val="400"/>
+              </a:spcBef>
+              <a:spcAft>
+                <a:spcPts val="0"/>
+              </a:spcAft>
+            </a:pPr>
+            <a:r>
+              <a:rPr sz="1050" b="0" i="0">
+                <a:solidFill>
+                  <a:srgbClr val="16203C"/>
+                </a:solidFill>
+                <a:latin typeface="Consolas"/>
+              </a:rPr>
+              <a:t>· Intake parameters</a:t>
+            </a:r>
+          </a:p>
+          <a:p>
+            <a:pPr algn="l">
+              <a:lnSpc>
+                <a:spcPct val="102000"/>
+              </a:lnSpc>
+              <a:spcBef>
+                <a:spcPts val="400"/>
+              </a:spcBef>
+              <a:spcAft>
+                <a:spcPts val="0"/>
+              </a:spcAft>
+            </a:pPr>
+            <a:r>
+              <a:rPr sz="1050" b="0" i="0">
+                <a:solidFill>
+                  <a:srgbClr val="16203C"/>
+                </a:solidFill>
+                <a:latin typeface="Consolas"/>
+              </a:rPr>
+              <a:t>· FACTS  (the only numbers)</a:t>
+            </a:r>
+          </a:p>
+          <a:p>
+            <a:pPr algn="l">
+              <a:lnSpc>
+                <a:spcPct val="102000"/>
+              </a:lnSpc>
+              <a:spcBef>
+                <a:spcPts val="400"/>
+              </a:spcBef>
+              <a:spcAft>
+                <a:spcPts val="0"/>
+              </a:spcAft>
+            </a:pPr>
+            <a:r>
+              <a:rPr sz="1050" b="0" i="0">
+                <a:solidFill>
+                  <a:srgbClr val="16203C"/>
+                </a:solidFill>
+                <a:latin typeface="Consolas"/>
+              </a:rPr>
+              <a:t>· Holdings + statement source</a:t>
+            </a:r>
+          </a:p>
+          <a:p>
+            <a:pPr algn="l">
+              <a:lnSpc>
+                <a:spcPct val="102000"/>
+              </a:lnSpc>
+              <a:spcBef>
+                <a:spcPts val="400"/>
+              </a:spcBef>
+              <a:spcAft>
+                <a:spcPts val="0"/>
+              </a:spcAft>
+            </a:pPr>
+            <a:r>
+              <a:rPr sz="1050" b="0" i="0">
+                <a:solidFill>
+                  <a:srgbClr val="16203C"/>
+                </a:solidFill>
+                <a:latin typeface="Consolas"/>
+              </a:rPr>
+              <a:t>· Research / other documents</a:t>
+            </a:r>
+          </a:p>
+          <a:p>
+            <a:pPr algn="l">
+              <a:lnSpc>
+                <a:spcPct val="102000"/>
+              </a:lnSpc>
+              <a:spcBef>
+                <a:spcPts val="400"/>
+              </a:spcBef>
+              <a:spcAft>
+                <a:spcPts val="0"/>
+              </a:spcAft>
+            </a:pPr>
+            <a:r>
+              <a:rPr sz="1050" b="0" i="0">
+                <a:solidFill>
+                  <a:srgbClr val="16203C"/>
+                </a:solidFill>
+                <a:latin typeface="Consolas"/>
+              </a:rPr>
+              <a:t>· Tactical text (verbatim)</a:t>
             </a:r>
           </a:p>
           <a:p>
@@ -3517,20 +3627,20 @@
                 <a:spcPct val="100000"/>
               </a:lnSpc>
               <a:spcBef>
-                <a:spcPts val="1100"/>
+                <a:spcPts val="700"/>
               </a:spcBef>
               <a:spcAft>
                 <a:spcPts val="0"/>
               </a:spcAft>
             </a:pPr>
             <a:r>
-              <a:rPr sz="1200" b="1" i="0">
-                <a:solidFill>
-                  <a:srgbClr val="2F6F57"/>
+              <a:rPr sz="1000" b="1" i="0">
+                <a:solidFill>
+                  <a:srgbClr val="9C7422"/>
                 </a:solidFill>
                 <a:latin typeface="Calibri"/>
               </a:rPr>
-              <a:t>✓ typed &amp; confirmed</a:t>
+              <a:t>Editable · copyable · on the Proposal page</a:t>
             </a:r>
           </a:p>
         </p:txBody>
@@ -3580,57 +3690,14 @@
       </p:sp>
       <p:sp>
         <p:nvSpPr>
-          <p:cNvPr id="8" name="TextBox 7"/>
-          <p:cNvSpPr txBox="1"/>
+          <p:cNvPr id="8" name="Rounded Rectangle 7"/>
+          <p:cNvSpPr/>
           <p:nvPr/>
         </p:nvSpPr>
         <p:spPr>
           <a:xfrm>
-            <a:off x="6099048" y="3191256"/>
-            <a:ext cx="457200" cy="475488"/>
-          </a:xfrm>
-          <a:prstGeom prst="rect">
-            <a:avLst/>
-          </a:prstGeom>
-          <a:noFill/>
-        </p:spPr>
-        <p:txBody>
-          <a:bodyPr wrap="square" anchor="ctr"/>
-          <a:lstStyle/>
-          <a:p>
-            <a:pPr algn="ctr">
-              <a:lnSpc>
-                <a:spcPct val="100000"/>
-              </a:lnSpc>
-              <a:spcBef>
-                <a:spcPts val="0"/>
-              </a:spcBef>
-              <a:spcAft>
-                <a:spcPts val="0"/>
-              </a:spcAft>
-            </a:pPr>
-            <a:r>
-              <a:rPr sz="3000" b="0" i="0">
-                <a:solidFill>
-                  <a:srgbClr val="C8CDDD"/>
-                </a:solidFill>
-                <a:latin typeface="Calibri"/>
-              </a:rPr>
-              <a:t>›</a:t>
-            </a:r>
-          </a:p>
-        </p:txBody>
-      </p:sp>
-      <p:sp>
-        <p:nvSpPr>
-          <p:cNvPr id="9" name="Rounded Rectangle 8"/>
-          <p:cNvSpPr/>
-          <p:nvPr/>
-        </p:nvSpPr>
-        <p:spPr>
-          <a:xfrm>
-            <a:off x="6492240" y="1828800"/>
-            <a:ext cx="4965192" cy="932688"/>
+            <a:off x="6903720" y="1828800"/>
+            <a:ext cx="4553712" cy="932688"/>
           </a:xfrm>
           <a:prstGeom prst="roundRect">
             <a:avLst>
@@ -3683,7 +3750,7 @@
                 </a:solidFill>
                 <a:latin typeface="Calibri"/>
               </a:rPr>
-              <a:t>📡  Monitoring watchlist</a:t>
+              <a:t>✨  AI Model writes the narrative</a:t>
             </a:r>
           </a:p>
           <a:p>
@@ -3705,64 +3772,21 @@
                 </a:solidFill>
                 <a:latin typeface="Calibri"/>
               </a:rPr>
-              <a:t>Level-based triggers to watch the book against.</a:t>
-            </a:r>
-          </a:p>
-          <a:p>
-            <a:pPr>
-              <a:spcBef>
-                <a:spcPts val="400"/>
-              </a:spcBef>
-            </a:pPr>
-            <a:r>
-              <a:rPr sz="1050" b="1">
-                <a:solidFill>
-                  <a:srgbClr val="16203C"/>
-                </a:solidFill>
-                <a:latin typeface="Consolas"/>
-              </a:rPr>
-              <a:t>S&amp;P 500 · </a:t>
-            </a:r>
-            <a:r>
-              <a:rPr sz="1050" b="1">
-                <a:solidFill>
-                  <a:srgbClr val="9C7422"/>
-                </a:solidFill>
-                <a:latin typeface="Consolas"/>
-              </a:rPr>
-              <a:t>−15/−20%</a:t>
-            </a:r>
-            <a:r>
-              <a:rPr sz="1050" b="1">
-                <a:solidFill>
-                  <a:srgbClr val="16203C"/>
-                </a:solidFill>
-                <a:latin typeface="Consolas"/>
-              </a:rPr>
-              <a:t>     Gold · </a:t>
-            </a:r>
-            <a:r>
-              <a:rPr sz="1050" b="1">
-                <a:solidFill>
-                  <a:srgbClr val="9C7422"/>
-                </a:solidFill>
-                <a:latin typeface="Consolas"/>
-              </a:rPr>
-              <a:t>&lt; $4,000</a:t>
-            </a:r>
-          </a:p>
-        </p:txBody>
-      </p:sp>
-      <p:sp>
-        <p:nvSpPr>
-          <p:cNvPr id="10" name="TextBox 9"/>
+              <a:t>The CIO commentary, shaped by the parameters, documents &amp; instructions.</a:t>
+            </a:r>
+          </a:p>
+        </p:txBody>
+      </p:sp>
+      <p:sp>
+        <p:nvSpPr>
+          <p:cNvPr id="9" name="TextBox 8"/>
           <p:cNvSpPr txBox="1"/>
           <p:nvPr/>
         </p:nvSpPr>
         <p:spPr>
           <a:xfrm>
-            <a:off x="9262872" y="1920240"/>
-            <a:ext cx="2084831" cy="274320"/>
+            <a:off x="9079992" y="1920240"/>
+            <a:ext cx="2267712" cy="274320"/>
           </a:xfrm>
           <a:prstGeom prst="rect">
             <a:avLst/>
@@ -3791,21 +3815,153 @@
                 </a:solidFill>
                 <a:latin typeface="Calibri"/>
               </a:rPr>
-              <a:t>LIVES IN THE COPILOT</a:t>
-            </a:r>
-          </a:p>
-        </p:txBody>
-      </p:sp>
-      <p:sp>
-        <p:nvSpPr>
-          <p:cNvPr id="11" name="Rounded Rectangle 10"/>
+              <a:t>GENERATED PROSE</a:t>
+            </a:r>
+          </a:p>
+        </p:txBody>
+      </p:sp>
+      <p:sp>
+        <p:nvSpPr>
+          <p:cNvPr id="10" name="Rounded Rectangle 9"/>
           <p:cNvSpPr/>
           <p:nvPr/>
         </p:nvSpPr>
         <p:spPr>
           <a:xfrm>
-            <a:off x="6492240" y="2962656"/>
-            <a:ext cx="4965192" cy="932688"/>
+            <a:off x="6903720" y="2962656"/>
+            <a:ext cx="4553712" cy="932688"/>
+          </a:xfrm>
+          <a:prstGeom prst="roundRect">
+            <a:avLst>
+              <a:gd name="adj" fmla="val 8000"/>
+            </a:avLst>
+          </a:prstGeom>
+          <a:solidFill>
+            <a:srgbClr val="E6F1EB"/>
+          </a:solidFill>
+          <a:ln w="15875">
+            <a:solidFill>
+              <a:srgbClr val="2F6F57"/>
+            </a:solidFill>
+          </a:ln>
+          <a:effectLst/>
+        </p:spPr>
+        <p:style>
+          <a:lnRef idx="1">
+            <a:schemeClr val="accent1"/>
+          </a:lnRef>
+          <a:fillRef idx="3">
+            <a:schemeClr val="accent1"/>
+          </a:fillRef>
+          <a:effectRef idx="2">
+            <a:schemeClr val="accent1"/>
+          </a:effectRef>
+          <a:fontRef idx="minor">
+            <a:schemeClr val="lt1"/>
+          </a:fontRef>
+        </p:style>
+        <p:txBody>
+          <a:bodyPr rtlCol="0" anchor="t" wrap="square" lIns="137160" rIns="137160" tIns="100584" bIns="100584"/>
+          <a:lstStyle/>
+          <a:p>
+            <a:pPr algn="l">
+              <a:lnSpc>
+                <a:spcPct val="100000"/>
+              </a:lnSpc>
+              <a:spcBef>
+                <a:spcPts val="0"/>
+              </a:spcBef>
+              <a:spcAft>
+                <a:spcPts val="0"/>
+              </a:spcAft>
+            </a:pPr>
+            <a:r>
+              <a:rPr sz="1300" b="1" i="0">
+                <a:solidFill>
+                  <a:srgbClr val="16203C"/>
+                </a:solidFill>
+                <a:latin typeface="Calibri"/>
+              </a:rPr>
+              <a:t>📊  Deterministic tables</a:t>
+            </a:r>
+          </a:p>
+          <a:p>
+            <a:pPr algn="l">
+              <a:lnSpc>
+                <a:spcPct val="104000"/>
+              </a:lnSpc>
+              <a:spcBef>
+                <a:spcPts val="300"/>
+              </a:spcBef>
+              <a:spcAft>
+                <a:spcPts val="0"/>
+              </a:spcAft>
+            </a:pPr>
+            <a:r>
+              <a:rPr sz="1050" b="0" i="0">
+                <a:solidFill>
+                  <a:srgbClr val="47517A"/>
+                </a:solidFill>
+                <a:latin typeface="Calibri"/>
+              </a:rPr>
+              <a:t>Allocation · drift · rebalance · suitability — computed by the engine.</a:t>
+            </a:r>
+          </a:p>
+        </p:txBody>
+      </p:sp>
+      <p:sp>
+        <p:nvSpPr>
+          <p:cNvPr id="11" name="TextBox 10"/>
+          <p:cNvSpPr txBox="1"/>
+          <p:nvPr/>
+        </p:nvSpPr>
+        <p:spPr>
+          <a:xfrm>
+            <a:off x="8897112" y="3054096"/>
+            <a:ext cx="2450592" cy="274320"/>
+          </a:xfrm>
+          <a:prstGeom prst="rect">
+            <a:avLst/>
+          </a:prstGeom>
+          <a:noFill/>
+        </p:spPr>
+        <p:txBody>
+          <a:bodyPr wrap="square" anchor="t"/>
+          <a:lstStyle/>
+          <a:p>
+            <a:pPr algn="r">
+              <a:lnSpc>
+                <a:spcPct val="100000"/>
+              </a:lnSpc>
+              <a:spcBef>
+                <a:spcPts val="0"/>
+              </a:spcBef>
+              <a:spcAft>
+                <a:spcPts val="0"/>
+              </a:spcAft>
+            </a:pPr>
+            <a:r>
+              <a:rPr sz="900" b="1" i="0" spc="40">
+                <a:solidFill>
+                  <a:srgbClr val="2F6F57"/>
+                </a:solidFill>
+                <a:latin typeface="Calibri"/>
+              </a:rPr>
+              <a:t>COMPUTED, NOT INVENTED</a:t>
+            </a:r>
+          </a:p>
+        </p:txBody>
+      </p:sp>
+      <p:sp>
+        <p:nvSpPr>
+          <p:cNvPr id="12" name="Rounded Rectangle 11"/>
+          <p:cNvSpPr/>
+          <p:nvPr/>
+        </p:nvSpPr>
+        <p:spPr>
+          <a:xfrm>
+            <a:off x="6903720" y="4096511"/>
+            <a:ext cx="4553712" cy="932688"/>
           </a:xfrm>
           <a:prstGeom prst="roundRect">
             <a:avLst>
@@ -3858,7 +4014,7 @@
                 </a:solidFill>
                 <a:latin typeface="Calibri"/>
               </a:rPr>
-              <a:t>🧭  Analyst guidance</a:t>
+              <a:t>📋  A portable prompt</a:t>
             </a:r>
           </a:p>
           <a:p>
@@ -3880,43 +4036,21 @@
                 </a:solidFill>
                 <a:latin typeface="Calibri"/>
               </a:rPr>
-              <a:t>Intent that shapes the written advice — never the figures.</a:t>
-            </a:r>
-          </a:p>
-          <a:p>
-            <a:pPr algn="l">
-              <a:lnSpc>
-                <a:spcPct val="100000"/>
-              </a:lnSpc>
-              <a:spcBef>
-                <a:spcPts val="400"/>
-              </a:spcBef>
-              <a:spcAft>
-                <a:spcPts val="0"/>
-              </a:spcAft>
-            </a:pPr>
-            <a:r>
-              <a:rPr sz="1050" b="0" i="0">
-                <a:solidFill>
-                  <a:srgbClr val="47517A"/>
-                </a:solidFill>
-                <a:latin typeface="Consolas"/>
-              </a:rPr>
-              <a:t>Execution style · selection criteria · open questions</a:t>
-            </a:r>
-          </a:p>
-        </p:txBody>
-      </p:sp>
-      <p:sp>
-        <p:nvSpPr>
-          <p:cNvPr id="12" name="TextBox 11"/>
+              <a:t>Copy it into any AI model to reproduce the proposal and compare outputs.</a:t>
+            </a:r>
+          </a:p>
+        </p:txBody>
+      </p:sp>
+      <p:sp>
+        <p:nvSpPr>
+          <p:cNvPr id="13" name="TextBox 12"/>
           <p:cNvSpPr txBox="1"/>
           <p:nvPr/>
         </p:nvSpPr>
         <p:spPr>
           <a:xfrm>
-            <a:off x="8531351" y="3054096"/>
-            <a:ext cx="2788920" cy="274320"/>
+            <a:off x="9262872" y="4187951"/>
+            <a:ext cx="2084831" cy="274320"/>
           </a:xfrm>
           <a:prstGeom prst="rect">
             <a:avLst/>
@@ -3939,124 +4073,13 @@
               </a:spcAft>
             </a:pPr>
             <a:r>
-              <a:rPr sz="900" b="1" i="0" spc="40">
+              <a:rPr sz="900" b="1" i="0" spc="50">
                 <a:solidFill>
                   <a:srgbClr val="838CAD"/>
                 </a:solidFill>
                 <a:latin typeface="Calibri"/>
               </a:rPr>
-              <a:t>PROPOSAL DECK · CIO COMMENTARY</a:t>
-            </a:r>
-          </a:p>
-        </p:txBody>
-      </p:sp>
-      <p:sp>
-        <p:nvSpPr>
-          <p:cNvPr id="13" name="Rounded Rectangle 12"/>
-          <p:cNvSpPr/>
-          <p:nvPr/>
-        </p:nvSpPr>
-        <p:spPr>
-          <a:xfrm>
-            <a:off x="6492240" y="4096511"/>
-            <a:ext cx="4965192" cy="932688"/>
-          </a:xfrm>
-          <a:prstGeom prst="roundRect">
-            <a:avLst>
-              <a:gd name="adj" fmla="val 8000"/>
-            </a:avLst>
-          </a:prstGeom>
-          <a:solidFill>
-            <a:srgbClr val="E6F1EB"/>
-          </a:solidFill>
-          <a:ln w="15875">
-            <a:solidFill>
-              <a:srgbClr val="2F6F57"/>
-            </a:solidFill>
-          </a:ln>
-          <a:effectLst/>
-        </p:spPr>
-        <p:style>
-          <a:lnRef idx="1">
-            <a:schemeClr val="accent1"/>
-          </a:lnRef>
-          <a:fillRef idx="3">
-            <a:schemeClr val="accent1"/>
-          </a:fillRef>
-          <a:effectRef idx="2">
-            <a:schemeClr val="accent1"/>
-          </a:effectRef>
-          <a:fontRef idx="minor">
-            <a:schemeClr val="lt1"/>
-          </a:fontRef>
-        </p:style>
-        <p:txBody>
-          <a:bodyPr rtlCol="0" anchor="t" wrap="square" lIns="137160" rIns="137160" tIns="100584" bIns="100584"/>
-          <a:lstStyle/>
-          <a:p>
-            <a:pPr algn="l">
-              <a:lnSpc>
-                <a:spcPct val="100000"/>
-              </a:lnSpc>
-              <a:spcBef>
-                <a:spcPts val="0"/>
-              </a:spcBef>
-              <a:spcAft>
-                <a:spcPts val="0"/>
-              </a:spcAft>
-            </a:pPr>
-            <a:r>
-              <a:rPr sz="1300" b="1" i="0">
-                <a:solidFill>
-                  <a:srgbClr val="16203C"/>
-                </a:solidFill>
-                <a:latin typeface="Calibri"/>
-              </a:rPr>
-              <a:t>📥  Proposed allocation</a:t>
-            </a:r>
-          </a:p>
-          <a:p>
-            <a:pPr algn="l">
-              <a:lnSpc>
-                <a:spcPct val="104000"/>
-              </a:lnSpc>
-              <a:spcBef>
-                <a:spcPts val="300"/>
-              </a:spcBef>
-              <a:spcAft>
-                <a:spcPts val="0"/>
-              </a:spcAft>
-            </a:pPr>
-            <a:r>
-              <a:rPr sz="1050" b="0" i="0">
-                <a:solidFill>
-                  <a:srgbClr val="47517A"/>
-                </a:solidFill>
-                <a:latin typeface="Calibri"/>
-              </a:rPr>
-              <a:t>If the client stated weights → offered to fill the sleeves.</a:t>
-            </a:r>
-          </a:p>
-          <a:p>
-            <a:pPr algn="l">
-              <a:lnSpc>
-                <a:spcPct val="100000"/>
-              </a:lnSpc>
-              <a:spcBef>
-                <a:spcPts val="400"/>
-              </a:spcBef>
-              <a:spcAft>
-                <a:spcPts val="0"/>
-              </a:spcAft>
-            </a:pPr>
-            <a:r>
-              <a:rPr sz="1050" b="0" i="0">
-                <a:solidFill>
-                  <a:srgbClr val="47517A"/>
-                </a:solidFill>
-                <a:latin typeface="Consolas"/>
-              </a:rPr>
-              <a:t>Nasdaq 20% + S&amp;P 30% → equity 50%</a:t>
+              <a:t>TEST ANY MODEL</a:t>
             </a:r>
           </a:p>
         </p:txBody>
@@ -4069,50 +4092,7 @@
         </p:nvSpPr>
         <p:spPr>
           <a:xfrm>
-            <a:off x="9262872" y="4187951"/>
-            <a:ext cx="2084831" cy="274320"/>
-          </a:xfrm>
-          <a:prstGeom prst="rect">
-            <a:avLst/>
-          </a:prstGeom>
-          <a:noFill/>
-        </p:spPr>
-        <p:txBody>
-          <a:bodyPr wrap="square" anchor="t"/>
-          <a:lstStyle/>
-          <a:p>
-            <a:pPr algn="r">
-              <a:lnSpc>
-                <a:spcPct val="100000"/>
-              </a:lnSpc>
-              <a:spcBef>
-                <a:spcPts val="0"/>
-              </a:spcBef>
-              <a:spcAft>
-                <a:spcPts val="0"/>
-              </a:spcAft>
-            </a:pPr>
-            <a:r>
-              <a:rPr sz="900" b="1" i="0" spc="50">
-                <a:solidFill>
-                  <a:srgbClr val="2F6F57"/>
-                </a:solidFill>
-                <a:latin typeface="Calibri"/>
-              </a:rPr>
-              <a:t>YOU APPLY / IGNORE</a:t>
-            </a:r>
-          </a:p>
-        </p:txBody>
-      </p:sp>
-      <p:sp>
-        <p:nvSpPr>
-          <p:cNvPr id="15" name="TextBox 14"/>
-          <p:cNvSpPr txBox="1"/>
-          <p:nvPr/>
-        </p:nvSpPr>
-        <p:spPr>
-          <a:xfrm>
-            <a:off x="6099048" y="3191256"/>
+            <a:off x="6510528" y="3191256"/>
             <a:ext cx="457200" cy="475488"/>
           </a:xfrm>
           <a:prstGeom prst="rect">
@@ -4149,7 +4129,7 @@
       </p:sp>
       <p:sp>
         <p:nvSpPr>
-          <p:cNvPr id="16" name="Rounded Rectangle 15"/>
+          <p:cNvPr id="15" name="Rounded Rectangle 14"/>
           <p:cNvSpPr/>
           <p:nvPr/>
         </p:nvSpPr>
@@ -4207,7 +4187,7 @@
                 </a:solidFill>
                 <a:latin typeface="Calibri"/>
               </a:rPr>
-              <a:t>THE GUARDRAIL · v8 TIERED</a:t>
+              <a:t>THE GUARDRAIL</a:t>
             </a:r>
           </a:p>
           <a:p>
@@ -4229,7 +4209,7 @@
                 </a:solidFill>
                 <a:latin typeface="Georgia"/>
               </a:rPr>
-              <a:t>Each item is tiered 🔒 enforced / 📡 monitored / 📝 advisory. An enforced price trigger can gate a rebalance buy (→ hold) against a sourced live price; everything else shapes the narrative &amp; watchlist. A client's condition can gate or flag a trade — never invent one.</a:t>
+              <a:t>The AI Model writes prose only — every figure is computed deterministically by the engine, so nothing is invented. Qualitative claims drawn from the client's documents are context, not independently verified. The UI is model-agnostic — it always reads “AI Model”.</a:t>
             </a:r>
           </a:p>
         </p:txBody>
